--- a/ppt/IoTAI16-FineTuning.pptx
+++ b/ppt/IoTAI16-FineTuning.pptx
@@ -5,18 +5,16 @@
     <p:sldMasterId id="2147483653" r:id="rId1"/>
   </p:sldMasterIdLst>
   <p:notesMasterIdLst>
-    <p:notesMasterId r:id="rId8"/>
+    <p:notesMasterId r:id="rId6"/>
   </p:notesMasterIdLst>
   <p:handoutMasterIdLst>
-    <p:handoutMasterId r:id="rId9"/>
+    <p:handoutMasterId r:id="rId7"/>
   </p:handoutMasterIdLst>
   <p:sldIdLst>
     <p:sldId id="264" r:id="rId2"/>
     <p:sldId id="272" r:id="rId3"/>
-    <p:sldId id="271" r:id="rId4"/>
-    <p:sldId id="273" r:id="rId5"/>
-    <p:sldId id="275" r:id="rId6"/>
-    <p:sldId id="277" r:id="rId7"/>
+    <p:sldId id="275" r:id="rId4"/>
+    <p:sldId id="277" r:id="rId5"/>
   </p:sldIdLst>
   <p:sldSz cx="9144000" cy="6858000" type="screen4x3"/>
   <p:notesSz cx="6648450" cy="9782175"/>
@@ -3676,42 +3674,11 @@
             <a:pPr eaLnBrk="1" hangingPunct="1"/>
             <a:r>
               <a:rPr lang="fr-FR" altLang="fr-FR" dirty="0"/>
-              <a:t>Chapitre 13</a:t>
-            </a:r>
-          </a:p>
-          <a:p>
-            <a:pPr eaLnBrk="1" hangingPunct="1"/>
-            <a:r>
-              <a:rPr lang="fr-FR" altLang="fr-FR" dirty="0"/>
               <a:t>Fine Tuning</a:t>
             </a:r>
           </a:p>
         </p:txBody>
       </p:sp>
-      <p:pic>
-        <p:nvPicPr>
-          <p:cNvPr id="2" name="Image 1"/>
-          <p:cNvPicPr>
-            <a:picLocks noChangeAspect="1"/>
-          </p:cNvPicPr>
-          <p:nvPr/>
-        </p:nvPicPr>
-        <p:blipFill>
-          <a:blip r:embed="rId2"/>
-          <a:stretch>
-            <a:fillRect/>
-          </a:stretch>
-        </p:blipFill>
-        <p:spPr>
-          <a:xfrm>
-            <a:off x="1214437" y="5023445"/>
-            <a:ext cx="6715125" cy="1285875"/>
-          </a:xfrm>
-          <a:prstGeom prst="rect">
-            <a:avLst/>
-          </a:prstGeom>
-        </p:spPr>
-      </p:pic>
       <p:sp>
         <p:nvSpPr>
           <p:cNvPr id="3" name="ZoneTexte 2"/>
@@ -3754,7 +3721,7 @@
           <p:nvPr/>
         </p:nvPicPr>
         <p:blipFill>
-          <a:blip r:embed="rId3" cstate="print">
+          <a:blip r:embed="rId2" cstate="print">
             <a:extLst>
               <a:ext uri="{28A0092B-C50C-407E-A947-70E740481C1C}">
                 <a14:useLocalDpi xmlns:a14="http://schemas.microsoft.com/office/drawing/2010/main" val="0"/>
@@ -3937,7 +3904,7 @@
           <a:p>
             <a:r>
               <a:rPr lang="fr-FR" dirty="0"/>
-              <a:t>Arguments Dense</a:t>
+              <a:t>SGD</a:t>
             </a:r>
           </a:p>
         </p:txBody>
@@ -3957,313 +3924,6 @@
           <a:bodyPr/>
           <a:lstStyle/>
           <a:p>
-            <a:endParaRPr lang="fr-FR"/>
-          </a:p>
-        </p:txBody>
-      </p:sp>
-      <p:pic>
-        <p:nvPicPr>
-          <p:cNvPr id="4" name="Image 3"/>
-          <p:cNvPicPr>
-            <a:picLocks noChangeAspect="1"/>
-          </p:cNvPicPr>
-          <p:nvPr/>
-        </p:nvPicPr>
-        <p:blipFill>
-          <a:blip r:embed="rId2"/>
-          <a:stretch>
-            <a:fillRect/>
-          </a:stretch>
-        </p:blipFill>
-        <p:spPr>
-          <a:xfrm>
-            <a:off x="179511" y="1394484"/>
-            <a:ext cx="8866579" cy="3762708"/>
-          </a:xfrm>
-          <a:prstGeom prst="rect">
-            <a:avLst/>
-          </a:prstGeom>
-        </p:spPr>
-      </p:pic>
-    </p:spTree>
-    <p:extLst>
-      <p:ext uri="{BB962C8B-B14F-4D97-AF65-F5344CB8AC3E}">
-        <p14:creationId xmlns:p14="http://schemas.microsoft.com/office/powerpoint/2010/main" val="3723461679"/>
-      </p:ext>
-    </p:extLst>
-  </p:cSld>
-  <p:clrMapOvr>
-    <a:masterClrMapping/>
-  </p:clrMapOvr>
-</p:sld>
-</file>
-
-<file path=ppt/slides/slide4.xml><?xml version="1.0" encoding="utf-8"?>
-<p:sld xmlns:a="http://schemas.openxmlformats.org/drawingml/2006/main" xmlns:r="http://schemas.openxmlformats.org/officeDocument/2006/relationships" xmlns:p="http://schemas.openxmlformats.org/presentationml/2006/main">
-  <p:cSld>
-    <p:spTree>
-      <p:nvGrpSpPr>
-        <p:cNvPr id="1" name=""/>
-        <p:cNvGrpSpPr/>
-        <p:nvPr/>
-      </p:nvGrpSpPr>
-      <p:grpSpPr>
-        <a:xfrm>
-          <a:off x="0" y="0"/>
-          <a:ext cx="0" cy="0"/>
-          <a:chOff x="0" y="0"/>
-          <a:chExt cx="0" cy="0"/>
-        </a:xfrm>
-      </p:grpSpPr>
-      <p:sp>
-        <p:nvSpPr>
-          <p:cNvPr id="2" name="Titre 1"/>
-          <p:cNvSpPr>
-            <a:spLocks noGrp="1"/>
-          </p:cNvSpPr>
-          <p:nvPr>
-            <p:ph type="title"/>
-          </p:nvPr>
-        </p:nvSpPr>
-        <p:spPr/>
-        <p:txBody>
-          <a:bodyPr/>
-          <a:lstStyle/>
-          <a:p>
-            <a:r>
-              <a:rPr lang="fr-FR" dirty="0" err="1"/>
-              <a:t>Hyperparamètres</a:t>
-            </a:r>
-            <a:endParaRPr lang="fr-FR" dirty="0"/>
-          </a:p>
-        </p:txBody>
-      </p:sp>
-      <p:sp>
-        <p:nvSpPr>
-          <p:cNvPr id="3" name="Espace réservé du contenu 2"/>
-          <p:cNvSpPr>
-            <a:spLocks noGrp="1"/>
-          </p:cNvSpPr>
-          <p:nvPr>
-            <p:ph idx="1"/>
-          </p:nvPr>
-        </p:nvSpPr>
-        <p:spPr/>
-        <p:txBody>
-          <a:bodyPr/>
-          <a:lstStyle/>
-          <a:p>
-            <a:r>
-              <a:rPr lang="fr-FR" dirty="0"/>
-              <a:t>Les réseaux </a:t>
-            </a:r>
-            <a:r>
-              <a:rPr lang="fr-FR" dirty="0" err="1"/>
-              <a:t>Deep</a:t>
-            </a:r>
-            <a:r>
-              <a:rPr lang="fr-FR" dirty="0"/>
-              <a:t> Learning possèdent de nombreux </a:t>
-            </a:r>
-            <a:r>
-              <a:rPr lang="fr-FR" dirty="0" err="1"/>
-              <a:t>hyperparamètres</a:t>
-            </a:r>
-            <a:endParaRPr lang="fr-FR" dirty="0"/>
-          </a:p>
-          <a:p>
-            <a:r>
-              <a:rPr lang="fr-FR" dirty="0" err="1"/>
-              <a:t>Keras</a:t>
-            </a:r>
-            <a:r>
-              <a:rPr lang="fr-FR" dirty="0"/>
-              <a:t> permet l'utilisation d'</a:t>
-            </a:r>
-            <a:r>
-              <a:rPr lang="fr-FR" dirty="0" err="1"/>
-              <a:t>hyperparamètres</a:t>
-            </a:r>
-            <a:endParaRPr lang="fr-FR" dirty="0"/>
-          </a:p>
-          <a:p>
-            <a:pPr lvl="1"/>
-            <a:r>
-              <a:rPr lang="fr-FR" dirty="0"/>
-              <a:t>Nombre et forme des filtres</a:t>
-            </a:r>
-          </a:p>
-          <a:p>
-            <a:pPr lvl="1"/>
-            <a:r>
-              <a:rPr lang="fr-FR" dirty="0"/>
-              <a:t>Régularisation</a:t>
-            </a:r>
-          </a:p>
-          <a:p>
-            <a:pPr lvl="2"/>
-            <a:r>
-              <a:rPr lang="fr-FR" dirty="0" err="1"/>
-              <a:t>DropOut</a:t>
-            </a:r>
-            <a:r>
-              <a:rPr lang="fr-FR" dirty="0"/>
-              <a:t>, </a:t>
-            </a:r>
-            <a:r>
-              <a:rPr lang="fr-FR" dirty="0" err="1"/>
-              <a:t>DropConnect</a:t>
-            </a:r>
-            <a:r>
-              <a:rPr lang="fr-FR" dirty="0"/>
-              <a:t>, …</a:t>
-            </a:r>
-          </a:p>
-          <a:p>
-            <a:pPr lvl="1"/>
-            <a:r>
-              <a:rPr lang="fr-FR" dirty="0" err="1"/>
-              <a:t>Optimizer</a:t>
-            </a:r>
-            <a:endParaRPr lang="fr-FR" dirty="0"/>
-          </a:p>
-          <a:p>
-            <a:pPr lvl="1"/>
-            <a:r>
-              <a:rPr lang="fr-FR" dirty="0" err="1"/>
-              <a:t>Strides</a:t>
-            </a:r>
-            <a:endParaRPr lang="fr-FR" dirty="0"/>
-          </a:p>
-          <a:p>
-            <a:pPr lvl="1"/>
-            <a:r>
-              <a:rPr lang="fr-FR" dirty="0"/>
-              <a:t>…</a:t>
-            </a:r>
-          </a:p>
-          <a:p>
-            <a:pPr lvl="1"/>
-            <a:endParaRPr lang="fr-FR" dirty="0"/>
-          </a:p>
-          <a:p>
-            <a:pPr lvl="2"/>
-            <a:endParaRPr lang="fr-FR" dirty="0"/>
-          </a:p>
-          <a:p>
-            <a:pPr lvl="1"/>
-            <a:endParaRPr lang="fr-FR" dirty="0"/>
-          </a:p>
-        </p:txBody>
-      </p:sp>
-      <p:pic>
-        <p:nvPicPr>
-          <p:cNvPr id="2050" name="Picture 2" descr="https://upload.wikimedia.org/wikipedia/commons/thumb/8/8a/Conv_layers.png/352px-Conv_layers.png"/>
-          <p:cNvPicPr>
-            <a:picLocks noChangeAspect="1" noChangeArrowheads="1"/>
-          </p:cNvPicPr>
-          <p:nvPr/>
-        </p:nvPicPr>
-        <p:blipFill>
-          <a:blip r:embed="rId2">
-            <a:extLst>
-              <a:ext uri="{28A0092B-C50C-407E-A947-70E740481C1C}">
-                <a14:useLocalDpi xmlns:a14="http://schemas.microsoft.com/office/drawing/2010/main" val="0"/>
-              </a:ext>
-            </a:extLst>
-          </a:blip>
-          <a:srcRect/>
-          <a:stretch>
-            <a:fillRect/>
-          </a:stretch>
-        </p:blipFill>
-        <p:spPr bwMode="auto">
-          <a:xfrm>
-            <a:off x="5107009" y="3645024"/>
-            <a:ext cx="3352800" cy="1828800"/>
-          </a:xfrm>
-          <a:prstGeom prst="rect">
-            <a:avLst/>
-          </a:prstGeom>
-          <a:noFill/>
-          <a:extLst>
-            <a:ext uri="{909E8E84-426E-40DD-AFC4-6F175D3DCCD1}">
-              <a14:hiddenFill xmlns:a14="http://schemas.microsoft.com/office/drawing/2010/main">
-                <a:solidFill>
-                  <a:srgbClr val="FFFFFF"/>
-                </a:solidFill>
-              </a14:hiddenFill>
-            </a:ext>
-          </a:extLst>
-        </p:spPr>
-      </p:pic>
-    </p:spTree>
-    <p:extLst>
-      <p:ext uri="{BB962C8B-B14F-4D97-AF65-F5344CB8AC3E}">
-        <p14:creationId xmlns:p14="http://schemas.microsoft.com/office/powerpoint/2010/main" val="2028914533"/>
-      </p:ext>
-    </p:extLst>
-  </p:cSld>
-  <p:clrMapOvr>
-    <a:masterClrMapping/>
-  </p:clrMapOvr>
-</p:sld>
-</file>
-
-<file path=ppt/slides/slide5.xml><?xml version="1.0" encoding="utf-8"?>
-<p:sld xmlns:a="http://schemas.openxmlformats.org/drawingml/2006/main" xmlns:r="http://schemas.openxmlformats.org/officeDocument/2006/relationships" xmlns:p="http://schemas.openxmlformats.org/presentationml/2006/main">
-  <p:cSld>
-    <p:spTree>
-      <p:nvGrpSpPr>
-        <p:cNvPr id="1" name=""/>
-        <p:cNvGrpSpPr/>
-        <p:nvPr/>
-      </p:nvGrpSpPr>
-      <p:grpSpPr>
-        <a:xfrm>
-          <a:off x="0" y="0"/>
-          <a:ext cx="0" cy="0"/>
-          <a:chOff x="0" y="0"/>
-          <a:chExt cx="0" cy="0"/>
-        </a:xfrm>
-      </p:grpSpPr>
-      <p:sp>
-        <p:nvSpPr>
-          <p:cNvPr id="2" name="Titre 1"/>
-          <p:cNvSpPr>
-            <a:spLocks noGrp="1"/>
-          </p:cNvSpPr>
-          <p:nvPr>
-            <p:ph type="title"/>
-          </p:nvPr>
-        </p:nvSpPr>
-        <p:spPr/>
-        <p:txBody>
-          <a:bodyPr/>
-          <a:lstStyle/>
-          <a:p>
-            <a:r>
-              <a:rPr lang="fr-FR" dirty="0"/>
-              <a:t>SGD</a:t>
-            </a:r>
-          </a:p>
-        </p:txBody>
-      </p:sp>
-      <p:sp>
-        <p:nvSpPr>
-          <p:cNvPr id="3" name="Espace réservé du contenu 2"/>
-          <p:cNvSpPr>
-            <a:spLocks noGrp="1"/>
-          </p:cNvSpPr>
-          <p:nvPr>
-            <p:ph idx="1"/>
-          </p:nvPr>
-        </p:nvSpPr>
-        <p:spPr/>
-        <p:txBody>
-          <a:bodyPr/>
-          <a:lstStyle/>
-          <a:p>
             <a:r>
               <a:rPr lang="fr-FR" dirty="0" err="1"/>
               <a:t>Stochastic</a:t>
@@ -4440,7 +4100,7 @@
 </p:sld>
 </file>
 
-<file path=ppt/slides/slide6.xml><?xml version="1.0" encoding="utf-8"?>
+<file path=ppt/slides/slide4.xml><?xml version="1.0" encoding="utf-8"?>
 <p:sld xmlns:a="http://schemas.openxmlformats.org/drawingml/2006/main" xmlns:r="http://schemas.openxmlformats.org/officeDocument/2006/relationships" xmlns:p="http://schemas.openxmlformats.org/presentationml/2006/main">
   <p:cSld>
     <p:spTree>
